--- a/docs/PageIndex_Handoff.pptx
+++ b/docs/PageIndex_Handoff.pptx
@@ -25,6 +25,7 @@
     <p:sldId id="273" r:id="rId24"/>
     <p:sldId id="274" r:id="rId25"/>
     <p:sldId id="275" r:id="rId26"/>
+    <p:sldId id="276" r:id="rId27"/>
   </p:sldIdLst>
   <p:sldSz cx="9144000" cy="6858000" type="screen4x3"/>
   <p:notesSz cx="6858000" cy="9144000"/>
@@ -3361,7 +3362,7 @@
               </a:defRPr>
             </a:pPr>
             <a:r>
-              <a:t>VTTI AI Chatbot</a:t>
+              <a:t>VTTI AI Chatbot (port 5001)</a:t>
             </a:r>
           </a:p>
           <a:p>
@@ -3391,7 +3392,7 @@
               </a:defRPr>
             </a:pPr>
             <a:r>
-              <a:t>http://localhost:5001</a:t>
+              <a:t>Multi-turn Q&amp;A + session history</a:t>
             </a:r>
           </a:p>
           <a:p>
@@ -3406,7 +3407,7 @@
               </a:defRPr>
             </a:pPr>
             <a:r>
-              <a:t>Multi-turn Q&amp;A with session history</a:t>
+              <a:t>SSE progress + source citations</a:t>
             </a:r>
           </a:p>
           <a:p>
@@ -3421,22 +3422,7 @@
               </a:defRPr>
             </a:pPr>
             <a:r>
-              <a:t>Progress streaming + clickable source citations</a:t>
-            </a:r>
-          </a:p>
-          <a:p>
-            <a:pPr>
-              <a:spcAft>
-                <a:spcPts val="800"/>
-              </a:spcAft>
-              <a:defRPr sz="1500">
-                <a:solidFill>
-                  <a:srgbClr val="1E293B"/>
-                </a:solidFill>
-              </a:defRPr>
-            </a:pPr>
-            <a:r>
-              <a:t>Requires results/DocIndex.json</a:t>
+              <a:t>See RAG-Interface/README.md</a:t>
             </a:r>
           </a:p>
         </p:txBody>
@@ -3509,7 +3495,7 @@
               </a:defRPr>
             </a:pPr>
             <a:r>
-              <a:t>DocIndex Manager</a:t>
+              <a:t>DocIndex Manager (port 5002)</a:t>
             </a:r>
           </a:p>
           <a:p>
@@ -3539,7 +3525,7 @@
               </a:defRPr>
             </a:pPr>
             <a:r>
-              <a:t>http://localhost:5002</a:t>
+              <a:t>Upload PDFs to Database/</a:t>
             </a:r>
           </a:p>
           <a:p>
@@ -3554,7 +3540,7 @@
               </a:defRPr>
             </a:pPr>
             <a:r>
-              <a:t>List PDFs, trigger re-index jobs</a:t>
+              <a:t>Index, re-index, or remove documents</a:t>
             </a:r>
           </a:p>
           <a:p>
@@ -3569,7 +3555,7 @@
               </a:defRPr>
             </a:pPr>
             <a:r>
-              <a:t>Add PDFs by copying to Database/</a:t>
+              <a:t>See DocIndex-Interface/README.md</a:t>
             </a:r>
           </a:p>
         </p:txBody>
@@ -3583,6 +3569,258 @@
 </file>
 
 <file path=ppt/slides/slide11.xml><?xml version="1.0" encoding="utf-8"?>
+<p:sld xmlns:a="http://schemas.openxmlformats.org/drawingml/2006/main" xmlns:p="http://schemas.openxmlformats.org/presentationml/2006/main" xmlns:r="http://schemas.openxmlformats.org/officeDocument/2006/relationships">
+  <p:cSld>
+    <p:bg>
+      <p:bgPr>
+        <a:solidFill>
+          <a:srgbClr val="FFFFFF"/>
+        </a:solidFill>
+        <a:effectLst/>
+      </p:bgPr>
+    </p:bg>
+    <p:spTree>
+      <p:nvGrpSpPr>
+        <p:cNvPr id="1" name=""/>
+        <p:cNvGrpSpPr/>
+        <p:nvPr/>
+      </p:nvGrpSpPr>
+      <p:grpSpPr/>
+      <p:sp>
+        <p:nvSpPr>
+          <p:cNvPr id="2" name="Rectangle 1"/>
+          <p:cNvSpPr/>
+          <p:nvPr/>
+        </p:nvSpPr>
+        <p:spPr>
+          <a:xfrm>
+            <a:off x="0" y="0"/>
+            <a:ext cx="9144000" cy="822960"/>
+          </a:xfrm>
+          <a:prstGeom prst="rect">
+            <a:avLst/>
+          </a:prstGeom>
+          <a:solidFill>
+            <a:srgbClr val="0D9488"/>
+          </a:solidFill>
+          <a:ln>
+            <a:noFill/>
+          </a:ln>
+        </p:spPr>
+        <p:style>
+          <a:lnRef idx="1">
+            <a:schemeClr val="accent1"/>
+          </a:lnRef>
+          <a:fillRef idx="3">
+            <a:schemeClr val="accent1"/>
+          </a:fillRef>
+          <a:effectRef idx="2">
+            <a:schemeClr val="accent1"/>
+          </a:effectRef>
+          <a:fontRef idx="minor">
+            <a:schemeClr val="lt1"/>
+          </a:fontRef>
+        </p:style>
+        <p:txBody>
+          <a:bodyPr rtlCol="0" anchor="ctr"/>
+          <a:lstStyle/>
+          <a:p>
+            <a:pPr algn="ctr"/>
+          </a:p>
+        </p:txBody>
+      </p:sp>
+      <p:sp>
+        <p:nvSpPr>
+          <p:cNvPr id="3" name="TextBox 2"/>
+          <p:cNvSpPr txBox="1"/>
+          <p:nvPr/>
+        </p:nvSpPr>
+        <p:spPr>
+          <a:xfrm>
+            <a:off x="457200" y="137160"/>
+            <a:ext cx="8229600" cy="640080"/>
+          </a:xfrm>
+          <a:prstGeom prst="rect">
+            <a:avLst/>
+          </a:prstGeom>
+          <a:noFill/>
+        </p:spPr>
+        <p:txBody>
+          <a:bodyPr wrap="none">
+            <a:spAutoFit/>
+          </a:bodyPr>
+          <a:lstStyle/>
+          <a:p>
+            <a:pPr>
+              <a:defRPr sz="2800" b="1">
+                <a:solidFill>
+                  <a:srgbClr val="FFFFFF"/>
+                </a:solidFill>
+              </a:defRPr>
+            </a:pPr>
+            <a:r>
+              <a:t>DocIndex Manager — Document Lifecycle</a:t>
+            </a:r>
+          </a:p>
+        </p:txBody>
+      </p:sp>
+      <p:sp>
+        <p:nvSpPr>
+          <p:cNvPr id="4" name="TextBox 3"/>
+          <p:cNvSpPr txBox="1"/>
+          <p:nvPr/>
+        </p:nvSpPr>
+        <p:spPr>
+          <a:xfrm>
+            <a:off x="502920" y="914400"/>
+            <a:ext cx="8229600" cy="365760"/>
+          </a:xfrm>
+          <a:prstGeom prst="rect">
+            <a:avLst/>
+          </a:prstGeom>
+          <a:noFill/>
+        </p:spPr>
+        <p:txBody>
+          <a:bodyPr wrap="none">
+            <a:spAutoFit/>
+          </a:bodyPr>
+          <a:lstStyle/>
+          <a:p>
+            <a:pPr>
+              <a:defRPr sz="1400" i="1">
+                <a:solidFill>
+                  <a:srgbClr val="475569"/>
+                </a:solidFill>
+              </a:defRPr>
+            </a:pPr>
+            <a:r>
+              <a:t>http://localhost:5002</a:t>
+            </a:r>
+          </a:p>
+        </p:txBody>
+      </p:sp>
+      <p:sp>
+        <p:nvSpPr>
+          <p:cNvPr id="5" name="TextBox 4"/>
+          <p:cNvSpPr txBox="1"/>
+          <p:nvPr/>
+        </p:nvSpPr>
+        <p:spPr>
+          <a:xfrm>
+            <a:off x="502920" y="1325880"/>
+            <a:ext cx="8229600" cy="5303520"/>
+          </a:xfrm>
+          <a:prstGeom prst="rect">
+            <a:avLst/>
+          </a:prstGeom>
+          <a:noFill/>
+        </p:spPr>
+        <p:txBody>
+          <a:bodyPr wrap="square" anchor="t">
+            <a:spAutoFit/>
+          </a:bodyPr>
+          <a:lstStyle/>
+          <a:p>
+            <a:pPr>
+              <a:spcAft>
+                <a:spcPts val="1000"/>
+              </a:spcAft>
+              <a:defRPr sz="1800">
+                <a:solidFill>
+                  <a:srgbClr val="1E293B"/>
+                </a:solidFill>
+              </a:defRPr>
+            </a:pPr>
+            <a:r>
+              <a:t>Upload: drag-and-drop or file picker → saves to Database/</a:t>
+            </a:r>
+          </a:p>
+          <a:p>
+            <a:pPr>
+              <a:spcAft>
+                <a:spcPts val="1000"/>
+              </a:spcAft>
+              <a:defRPr sz="1800">
+                <a:solidFill>
+                  <a:srgbClr val="1E293B"/>
+                </a:solidFill>
+              </a:defRPr>
+            </a:pPr>
+            <a:r>
+              <a:t>Add Structure: run_pageindex.py --update_docindex for one PDF</a:t>
+            </a:r>
+          </a:p>
+          <a:p>
+            <a:pPr>
+              <a:spcAft>
+                <a:spcPts val="1000"/>
+              </a:spcAft>
+              <a:defRPr sz="1800">
+                <a:solidFill>
+                  <a:srgbClr val="1E293B"/>
+                </a:solidFill>
+              </a:defRPr>
+            </a:pPr>
+            <a:r>
+              <a:t>Update Structure: re-index after PDF or config changes</a:t>
+            </a:r>
+          </a:p>
+          <a:p>
+            <a:pPr>
+              <a:spcAft>
+                <a:spcPts val="1000"/>
+              </a:spcAft>
+              <a:defRPr sz="1800">
+                <a:solidFill>
+                  <a:srgbClr val="1E293B"/>
+                </a:solidFill>
+              </a:defRPr>
+            </a:pPr>
+            <a:r>
+              <a:t>Remove: delete Database/ file + structure JSON + DocIndex keywords</a:t>
+            </a:r>
+          </a:p>
+          <a:p>
+            <a:pPr>
+              <a:spcAft>
+                <a:spcPts val="1000"/>
+              </a:spcAft>
+              <a:defRPr sz="1800">
+                <a:solidFill>
+                  <a:srgbClr val="1E293B"/>
+                </a:solidFill>
+              </a:defRPr>
+            </a:pPr>
+            <a:r>
+              <a:t>Reconstruct: build_docindex.py over all PDFs in Database/</a:t>
+            </a:r>
+          </a:p>
+          <a:p>
+            <a:pPr>
+              <a:spcAft>
+                <a:spcPts val="1000"/>
+              </a:spcAft>
+              <a:defRPr sz="1800">
+                <a:solidFill>
+                  <a:srgbClr val="1E293B"/>
+                </a:solidFill>
+              </a:defRPr>
+            </a:pPr>
+            <a:r>
+              <a:t>Restart server after code updates (Ctrl+C → python app.py)</a:t>
+            </a:r>
+          </a:p>
+        </p:txBody>
+      </p:sp>
+    </p:spTree>
+  </p:cSld>
+  <p:clrMapOvr>
+    <a:masterClrMapping/>
+  </p:clrMapOvr>
+</p:sld>
+</file>
+
+<file path=ppt/slides/slide12.xml><?xml version="1.0" encoding="utf-8"?>
 <p:sld xmlns:a="http://schemas.openxmlformats.org/drawingml/2006/main" xmlns:p="http://schemas.openxmlformats.org/presentationml/2006/main" xmlns:r="http://schemas.openxmlformats.org/officeDocument/2006/relationships">
   <p:cSld>
     <p:bg>
@@ -3631,253 +3869,6 @@
             </a:pPr>
             <a:r>
               <a:t>Configuration</a:t>
-            </a:r>
-          </a:p>
-        </p:txBody>
-      </p:sp>
-    </p:spTree>
-  </p:cSld>
-  <p:clrMapOvr>
-    <a:masterClrMapping/>
-  </p:clrMapOvr>
-</p:sld>
-</file>
-
-<file path=ppt/slides/slide12.xml><?xml version="1.0" encoding="utf-8"?>
-<p:sld xmlns:a="http://schemas.openxmlformats.org/drawingml/2006/main" xmlns:p="http://schemas.openxmlformats.org/presentationml/2006/main" xmlns:r="http://schemas.openxmlformats.org/officeDocument/2006/relationships">
-  <p:cSld>
-    <p:bg>
-      <p:bgPr>
-        <a:solidFill>
-          <a:srgbClr val="FFFFFF"/>
-        </a:solidFill>
-        <a:effectLst/>
-      </p:bgPr>
-    </p:bg>
-    <p:spTree>
-      <p:nvGrpSpPr>
-        <p:cNvPr id="1" name=""/>
-        <p:cNvGrpSpPr/>
-        <p:nvPr/>
-      </p:nvGrpSpPr>
-      <p:grpSpPr/>
-      <p:sp>
-        <p:nvSpPr>
-          <p:cNvPr id="2" name="Rectangle 1"/>
-          <p:cNvSpPr/>
-          <p:nvPr/>
-        </p:nvSpPr>
-        <p:spPr>
-          <a:xfrm>
-            <a:off x="0" y="0"/>
-            <a:ext cx="9144000" cy="822960"/>
-          </a:xfrm>
-          <a:prstGeom prst="rect">
-            <a:avLst/>
-          </a:prstGeom>
-          <a:solidFill>
-            <a:srgbClr val="0D9488"/>
-          </a:solidFill>
-          <a:ln>
-            <a:noFill/>
-          </a:ln>
-        </p:spPr>
-        <p:style>
-          <a:lnRef idx="1">
-            <a:schemeClr val="accent1"/>
-          </a:lnRef>
-          <a:fillRef idx="3">
-            <a:schemeClr val="accent1"/>
-          </a:fillRef>
-          <a:effectRef idx="2">
-            <a:schemeClr val="accent1"/>
-          </a:effectRef>
-          <a:fontRef idx="minor">
-            <a:schemeClr val="lt1"/>
-          </a:fontRef>
-        </p:style>
-        <p:txBody>
-          <a:bodyPr rtlCol="0" anchor="ctr"/>
-          <a:lstStyle/>
-          <a:p>
-            <a:pPr algn="ctr"/>
-          </a:p>
-        </p:txBody>
-      </p:sp>
-      <p:sp>
-        <p:nvSpPr>
-          <p:cNvPr id="3" name="TextBox 2"/>
-          <p:cNvSpPr txBox="1"/>
-          <p:nvPr/>
-        </p:nvSpPr>
-        <p:spPr>
-          <a:xfrm>
-            <a:off x="457200" y="137160"/>
-            <a:ext cx="8229600" cy="640080"/>
-          </a:xfrm>
-          <a:prstGeom prst="rect">
-            <a:avLst/>
-          </a:prstGeom>
-          <a:noFill/>
-        </p:spPr>
-        <p:txBody>
-          <a:bodyPr wrap="none">
-            <a:spAutoFit/>
-          </a:bodyPr>
-          <a:lstStyle/>
-          <a:p>
-            <a:pPr>
-              <a:defRPr sz="2800" b="1">
-                <a:solidFill>
-                  <a:srgbClr val="FFFFFF"/>
-                </a:solidFill>
-              </a:defRPr>
-            </a:pPr>
-            <a:r>
-              <a:t>Current Default Setup (Hybrid)</a:t>
-            </a:r>
-          </a:p>
-        </p:txBody>
-      </p:sp>
-      <p:sp>
-        <p:nvSpPr>
-          <p:cNvPr id="4" name="TextBox 3"/>
-          <p:cNvSpPr txBox="1"/>
-          <p:nvPr/>
-        </p:nvSpPr>
-        <p:spPr>
-          <a:xfrm>
-            <a:off x="502920" y="1051560"/>
-            <a:ext cx="8229600" cy="5303520"/>
-          </a:xfrm>
-          <a:prstGeom prst="rect">
-            <a:avLst/>
-          </a:prstGeom>
-          <a:noFill/>
-        </p:spPr>
-        <p:txBody>
-          <a:bodyPr wrap="square" anchor="t">
-            <a:spAutoFit/>
-          </a:bodyPr>
-          <a:lstStyle/>
-          <a:p>
-            <a:pPr>
-              <a:spcAft>
-                <a:spcPts val="1000"/>
-              </a:spcAft>
-              <a:defRPr sz="1800">
-                <a:solidFill>
-                  <a:srgbClr val="1E293B"/>
-                </a:solidFill>
-              </a:defRPr>
-            </a:pPr>
-            <a:r>
-              <a:t>llm_models.yaml:</a:t>
-            </a:r>
-          </a:p>
-          <a:p>
-            <a:pPr>
-              <a:spcAft>
-                <a:spcPts val="1000"/>
-              </a:spcAft>
-              <a:defRPr sz="1800">
-                <a:solidFill>
-                  <a:srgbClr val="1E293B"/>
-                </a:solidFill>
-              </a:defRPr>
-            </a:pPr>
-            <a:r>
-              <a:t>  indexing.chat_model: qwen7        → Ollama (summaries/abstract)</a:t>
-            </a:r>
-          </a:p>
-          <a:p>
-            <a:pPr>
-              <a:spcAft>
-                <a:spcPts val="1000"/>
-              </a:spcAft>
-              <a:defRPr sz="1800">
-                <a:solidFill>
-                  <a:srgbClr val="1E293B"/>
-                </a:solidFill>
-              </a:defRPr>
-            </a:pPr>
-            <a:r>
-              <a:t>  indexing.embed_model: mxbai-embed-large</a:t>
-            </a:r>
-          </a:p>
-          <a:p>
-            <a:pPr>
-              <a:spcAft>
-                <a:spcPts val="1000"/>
-              </a:spcAft>
-              <a:defRPr sz="1800">
-                <a:solidFill>
-                  <a:srgbClr val="1E293B"/>
-                </a:solidFill>
-              </a:defRPr>
-            </a:pPr>
-            <a:r>
-              <a:t>  rag.chat_model: gpt51             → OpenAI (needs CHATGPT_API_KEY)</a:t>
-            </a:r>
-          </a:p>
-          <a:p>
-            <a:pPr>
-              <a:spcAft>
-                <a:spcPts val="1000"/>
-              </a:spcAft>
-              <a:defRPr sz="1800">
-                <a:solidFill>
-                  <a:srgbClr val="1E293B"/>
-                </a:solidFill>
-              </a:defRPr>
-            </a:pPr>
-            <a:r>
-              <a:t>  rag.tree_search_model: gpt51</a:t>
-            </a:r>
-          </a:p>
-          <a:p>
-            <a:pPr>
-              <a:spcAft>
-                <a:spcPts val="1000"/>
-              </a:spcAft>
-              <a:defRPr sz="1800">
-                <a:solidFill>
-                  <a:srgbClr val="1E293B"/>
-                </a:solidFill>
-              </a:defRPr>
-            </a:pPr>
-            <a:r>
-              <a:t>  rag.keyword_embed_model: mxbai-embed-large → Ollama</a:t>
-            </a:r>
-          </a:p>
-          <a:p>
-            <a:pPr>
-              <a:spcAft>
-                <a:spcPts val="1000"/>
-              </a:spcAft>
-              <a:defRPr sz="1800">
-                <a:solidFill>
-                  <a:srgbClr val="1E293B"/>
-                </a:solidFill>
-              </a:defRPr>
-            </a:pPr>
-            <a:r>
-              <a:t>Embeddings ALWAYS use local Ollama — even when RAG chat uses OpenAI</a:t>
-            </a:r>
-          </a:p>
-          <a:p>
-            <a:pPr>
-              <a:spcAft>
-                <a:spcPts val="1000"/>
-              </a:spcAft>
-              <a:defRPr sz="1800">
-                <a:solidFill>
-                  <a:srgbClr val="1E293B"/>
-                </a:solidFill>
-              </a:defRPr>
-            </a:pPr>
-            <a:r>
-              <a:t>Fully local option: set all rag.* models to qwen7 in llm_models.yaml</a:t>
             </a:r>
           </a:p>
         </p:txBody>
@@ -3981,7 +3972,7 @@
               </a:defRPr>
             </a:pPr>
             <a:r>
-              <a:t>Model Routing (Automatic)</a:t>
+              <a:t>Current Default Setup (Hybrid)</a:t>
             </a:r>
           </a:p>
         </p:txBody>
@@ -4019,82 +4010,112 @@
               </a:defRPr>
             </a:pPr>
             <a:r>
-              <a:t>qwen7, llama8, ollama …  → Ollama at OLLAMA_BASE_URL</a:t>
-            </a:r>
-          </a:p>
-          <a:p>
-            <a:pPr>
-              <a:spcAft>
-                <a:spcPts val="1000"/>
-              </a:spcAft>
-              <a:defRPr sz="1800">
-                <a:solidFill>
-                  <a:srgbClr val="1E293B"/>
-                </a:solidFill>
-              </a:defRPr>
-            </a:pPr>
-            <a:r>
-              <a:t>gpt51, gpt4mini, gpt4 …  → OpenAI via CHATGPT_API_KEY in .env</a:t>
-            </a:r>
-          </a:p>
-          <a:p>
-            <a:pPr>
-              <a:spcAft>
-                <a:spcPts val="1000"/>
-              </a:spcAft>
-              <a:defRPr sz="1800">
-                <a:solidFill>
-                  <a:srgbClr val="1E293B"/>
-                </a:solidFill>
-              </a:defRPr>
-            </a:pPr>
-            <a:r>
-              <a:t>huggingface              → HF_TOKEN in .env</a:t>
-            </a:r>
-          </a:p>
-          <a:p>
-            <a:pPr>
-              <a:spcAft>
-                <a:spcPts val="1000"/>
-              </a:spcAft>
-              <a:defRPr sz="1800">
-                <a:solidFill>
-                  <a:srgbClr val="1E293B"/>
-                </a:solidFill>
-              </a:defRPr>
-            </a:pPr>
-            <a:r>
-              <a:t>mxbai-embed-large        → Ollama (always)</a:t>
-            </a:r>
-          </a:p>
-          <a:p>
-            <a:pPr>
-              <a:spcAft>
-                <a:spcPts val="1000"/>
-              </a:spcAft>
-              <a:defRPr sz="1800">
-                <a:solidFill>
-                  <a:srgbClr val="1E293B"/>
-                </a:solidFill>
-              </a:defRPr>
-            </a:pPr>
-            <a:r>
-              <a:t>API_PROVIDER env var is NOT used (legacy docs only)</a:t>
-            </a:r>
-          </a:p>
-          <a:p>
-            <a:pPr>
-              <a:spcAft>
-                <a:spcPts val="1000"/>
-              </a:spcAft>
-              <a:defRPr sz="1800">
-                <a:solidFill>
-                  <a:srgbClr val="1E293B"/>
-                </a:solidFill>
-              </a:defRPr>
-            </a:pPr>
-            <a:r>
-              <a:t>Restart Flask apps after changing llm_models.yaml</a:t>
+              <a:t>llm_models.yaml:</a:t>
+            </a:r>
+          </a:p>
+          <a:p>
+            <a:pPr>
+              <a:spcAft>
+                <a:spcPts val="1000"/>
+              </a:spcAft>
+              <a:defRPr sz="1800">
+                <a:solidFill>
+                  <a:srgbClr val="1E293B"/>
+                </a:solidFill>
+              </a:defRPr>
+            </a:pPr>
+            <a:r>
+              <a:t>  indexing.chat_model: qwen7        → Ollama (summaries/abstract)</a:t>
+            </a:r>
+          </a:p>
+          <a:p>
+            <a:pPr>
+              <a:spcAft>
+                <a:spcPts val="1000"/>
+              </a:spcAft>
+              <a:defRPr sz="1800">
+                <a:solidFill>
+                  <a:srgbClr val="1E293B"/>
+                </a:solidFill>
+              </a:defRPr>
+            </a:pPr>
+            <a:r>
+              <a:t>  indexing.embed_model: mxbai-embed-large</a:t>
+            </a:r>
+          </a:p>
+          <a:p>
+            <a:pPr>
+              <a:spcAft>
+                <a:spcPts val="1000"/>
+              </a:spcAft>
+              <a:defRPr sz="1800">
+                <a:solidFill>
+                  <a:srgbClr val="1E293B"/>
+                </a:solidFill>
+              </a:defRPr>
+            </a:pPr>
+            <a:r>
+              <a:t>  rag.chat_model: gpt51             → OpenAI (needs CHATGPT_API_KEY)</a:t>
+            </a:r>
+          </a:p>
+          <a:p>
+            <a:pPr>
+              <a:spcAft>
+                <a:spcPts val="1000"/>
+              </a:spcAft>
+              <a:defRPr sz="1800">
+                <a:solidFill>
+                  <a:srgbClr val="1E293B"/>
+                </a:solidFill>
+              </a:defRPr>
+            </a:pPr>
+            <a:r>
+              <a:t>  rag.tree_search_model: gpt51</a:t>
+            </a:r>
+          </a:p>
+          <a:p>
+            <a:pPr>
+              <a:spcAft>
+                <a:spcPts val="1000"/>
+              </a:spcAft>
+              <a:defRPr sz="1800">
+                <a:solidFill>
+                  <a:srgbClr val="1E293B"/>
+                </a:solidFill>
+              </a:defRPr>
+            </a:pPr>
+            <a:r>
+              <a:t>  rag.keyword_embed_model: mxbai-embed-large → Ollama</a:t>
+            </a:r>
+          </a:p>
+          <a:p>
+            <a:pPr>
+              <a:spcAft>
+                <a:spcPts val="1000"/>
+              </a:spcAft>
+              <a:defRPr sz="1800">
+                <a:solidFill>
+                  <a:srgbClr val="1E293B"/>
+                </a:solidFill>
+              </a:defRPr>
+            </a:pPr>
+            <a:r>
+              <a:t>Embeddings ALWAYS use local Ollama — even when RAG chat uses OpenAI</a:t>
+            </a:r>
+          </a:p>
+          <a:p>
+            <a:pPr>
+              <a:spcAft>
+                <a:spcPts val="1000"/>
+              </a:spcAft>
+              <a:defRPr sz="1800">
+                <a:solidFill>
+                  <a:srgbClr val="1E293B"/>
+                </a:solidFill>
+              </a:defRPr>
+            </a:pPr>
+            <a:r>
+              <a:t>Fully local option: set all rag.* models to qwen7 in llm_models.yaml</a:t>
             </a:r>
           </a:p>
         </p:txBody>
@@ -4108,6 +4129,223 @@
 </file>
 
 <file path=ppt/slides/slide14.xml><?xml version="1.0" encoding="utf-8"?>
+<p:sld xmlns:a="http://schemas.openxmlformats.org/drawingml/2006/main" xmlns:p="http://schemas.openxmlformats.org/presentationml/2006/main" xmlns:r="http://schemas.openxmlformats.org/officeDocument/2006/relationships">
+  <p:cSld>
+    <p:bg>
+      <p:bgPr>
+        <a:solidFill>
+          <a:srgbClr val="FFFFFF"/>
+        </a:solidFill>
+        <a:effectLst/>
+      </p:bgPr>
+    </p:bg>
+    <p:spTree>
+      <p:nvGrpSpPr>
+        <p:cNvPr id="1" name=""/>
+        <p:cNvGrpSpPr/>
+        <p:nvPr/>
+      </p:nvGrpSpPr>
+      <p:grpSpPr/>
+      <p:sp>
+        <p:nvSpPr>
+          <p:cNvPr id="2" name="Rectangle 1"/>
+          <p:cNvSpPr/>
+          <p:nvPr/>
+        </p:nvSpPr>
+        <p:spPr>
+          <a:xfrm>
+            <a:off x="0" y="0"/>
+            <a:ext cx="9144000" cy="822960"/>
+          </a:xfrm>
+          <a:prstGeom prst="rect">
+            <a:avLst/>
+          </a:prstGeom>
+          <a:solidFill>
+            <a:srgbClr val="0D9488"/>
+          </a:solidFill>
+          <a:ln>
+            <a:noFill/>
+          </a:ln>
+        </p:spPr>
+        <p:style>
+          <a:lnRef idx="1">
+            <a:schemeClr val="accent1"/>
+          </a:lnRef>
+          <a:fillRef idx="3">
+            <a:schemeClr val="accent1"/>
+          </a:fillRef>
+          <a:effectRef idx="2">
+            <a:schemeClr val="accent1"/>
+          </a:effectRef>
+          <a:fontRef idx="minor">
+            <a:schemeClr val="lt1"/>
+          </a:fontRef>
+        </p:style>
+        <p:txBody>
+          <a:bodyPr rtlCol="0" anchor="ctr"/>
+          <a:lstStyle/>
+          <a:p>
+            <a:pPr algn="ctr"/>
+          </a:p>
+        </p:txBody>
+      </p:sp>
+      <p:sp>
+        <p:nvSpPr>
+          <p:cNvPr id="3" name="TextBox 2"/>
+          <p:cNvSpPr txBox="1"/>
+          <p:nvPr/>
+        </p:nvSpPr>
+        <p:spPr>
+          <a:xfrm>
+            <a:off x="457200" y="137160"/>
+            <a:ext cx="8229600" cy="640080"/>
+          </a:xfrm>
+          <a:prstGeom prst="rect">
+            <a:avLst/>
+          </a:prstGeom>
+          <a:noFill/>
+        </p:spPr>
+        <p:txBody>
+          <a:bodyPr wrap="none">
+            <a:spAutoFit/>
+          </a:bodyPr>
+          <a:lstStyle/>
+          <a:p>
+            <a:pPr>
+              <a:defRPr sz="2800" b="1">
+                <a:solidFill>
+                  <a:srgbClr val="FFFFFF"/>
+                </a:solidFill>
+              </a:defRPr>
+            </a:pPr>
+            <a:r>
+              <a:t>Model Routing (Automatic)</a:t>
+            </a:r>
+          </a:p>
+        </p:txBody>
+      </p:sp>
+      <p:sp>
+        <p:nvSpPr>
+          <p:cNvPr id="4" name="TextBox 3"/>
+          <p:cNvSpPr txBox="1"/>
+          <p:nvPr/>
+        </p:nvSpPr>
+        <p:spPr>
+          <a:xfrm>
+            <a:off x="502920" y="1051560"/>
+            <a:ext cx="8229600" cy="5303520"/>
+          </a:xfrm>
+          <a:prstGeom prst="rect">
+            <a:avLst/>
+          </a:prstGeom>
+          <a:noFill/>
+        </p:spPr>
+        <p:txBody>
+          <a:bodyPr wrap="square" anchor="t">
+            <a:spAutoFit/>
+          </a:bodyPr>
+          <a:lstStyle/>
+          <a:p>
+            <a:pPr>
+              <a:spcAft>
+                <a:spcPts val="1000"/>
+              </a:spcAft>
+              <a:defRPr sz="1800">
+                <a:solidFill>
+                  <a:srgbClr val="1E293B"/>
+                </a:solidFill>
+              </a:defRPr>
+            </a:pPr>
+            <a:r>
+              <a:t>qwen7, llama8, ollama …  → Ollama at OLLAMA_BASE_URL</a:t>
+            </a:r>
+          </a:p>
+          <a:p>
+            <a:pPr>
+              <a:spcAft>
+                <a:spcPts val="1000"/>
+              </a:spcAft>
+              <a:defRPr sz="1800">
+                <a:solidFill>
+                  <a:srgbClr val="1E293B"/>
+                </a:solidFill>
+              </a:defRPr>
+            </a:pPr>
+            <a:r>
+              <a:t>gpt51, gpt4mini, gpt4 …  → OpenAI via CHATGPT_API_KEY in .env</a:t>
+            </a:r>
+          </a:p>
+          <a:p>
+            <a:pPr>
+              <a:spcAft>
+                <a:spcPts val="1000"/>
+              </a:spcAft>
+              <a:defRPr sz="1800">
+                <a:solidFill>
+                  <a:srgbClr val="1E293B"/>
+                </a:solidFill>
+              </a:defRPr>
+            </a:pPr>
+            <a:r>
+              <a:t>huggingface              → HF_TOKEN in .env</a:t>
+            </a:r>
+          </a:p>
+          <a:p>
+            <a:pPr>
+              <a:spcAft>
+                <a:spcPts val="1000"/>
+              </a:spcAft>
+              <a:defRPr sz="1800">
+                <a:solidFill>
+                  <a:srgbClr val="1E293B"/>
+                </a:solidFill>
+              </a:defRPr>
+            </a:pPr>
+            <a:r>
+              <a:t>mxbai-embed-large        → Ollama (always)</a:t>
+            </a:r>
+          </a:p>
+          <a:p>
+            <a:pPr>
+              <a:spcAft>
+                <a:spcPts val="1000"/>
+              </a:spcAft>
+              <a:defRPr sz="1800">
+                <a:solidFill>
+                  <a:srgbClr val="1E293B"/>
+                </a:solidFill>
+              </a:defRPr>
+            </a:pPr>
+            <a:r>
+              <a:t>API_PROVIDER env var is NOT used (legacy docs only)</a:t>
+            </a:r>
+          </a:p>
+          <a:p>
+            <a:pPr>
+              <a:spcAft>
+                <a:spcPts val="1000"/>
+              </a:spcAft>
+              <a:defRPr sz="1800">
+                <a:solidFill>
+                  <a:srgbClr val="1E293B"/>
+                </a:solidFill>
+              </a:defRPr>
+            </a:pPr>
+            <a:r>
+              <a:t>Restart Flask apps after changing llm_models.yaml</a:t>
+            </a:r>
+          </a:p>
+        </p:txBody>
+      </p:sp>
+    </p:spTree>
+  </p:cSld>
+  <p:clrMapOvr>
+    <a:masterClrMapping/>
+  </p:clrMapOvr>
+</p:sld>
+</file>
+
+<file path=ppt/slides/slide15.xml><?xml version="1.0" encoding="utf-8"?>
 <p:sld xmlns:a="http://schemas.openxmlformats.org/drawingml/2006/main" xmlns:p="http://schemas.openxmlformats.org/presentationml/2006/main" xmlns:r="http://schemas.openxmlformats.org/officeDocument/2006/relationships">
   <p:cSld>
     <p:bg>
@@ -4156,223 +4394,6 @@
             </a:pPr>
             <a:r>
               <a:t>Getting Started</a:t>
-            </a:r>
-          </a:p>
-        </p:txBody>
-      </p:sp>
-    </p:spTree>
-  </p:cSld>
-  <p:clrMapOvr>
-    <a:masterClrMapping/>
-  </p:clrMapOvr>
-</p:sld>
-</file>
-
-<file path=ppt/slides/slide15.xml><?xml version="1.0" encoding="utf-8"?>
-<p:sld xmlns:a="http://schemas.openxmlformats.org/drawingml/2006/main" xmlns:p="http://schemas.openxmlformats.org/presentationml/2006/main" xmlns:r="http://schemas.openxmlformats.org/officeDocument/2006/relationships">
-  <p:cSld>
-    <p:bg>
-      <p:bgPr>
-        <a:solidFill>
-          <a:srgbClr val="FFFFFF"/>
-        </a:solidFill>
-        <a:effectLst/>
-      </p:bgPr>
-    </p:bg>
-    <p:spTree>
-      <p:nvGrpSpPr>
-        <p:cNvPr id="1" name=""/>
-        <p:cNvGrpSpPr/>
-        <p:nvPr/>
-      </p:nvGrpSpPr>
-      <p:grpSpPr/>
-      <p:sp>
-        <p:nvSpPr>
-          <p:cNvPr id="2" name="Rectangle 1"/>
-          <p:cNvSpPr/>
-          <p:nvPr/>
-        </p:nvSpPr>
-        <p:spPr>
-          <a:xfrm>
-            <a:off x="0" y="0"/>
-            <a:ext cx="9144000" cy="822960"/>
-          </a:xfrm>
-          <a:prstGeom prst="rect">
-            <a:avLst/>
-          </a:prstGeom>
-          <a:solidFill>
-            <a:srgbClr val="0D9488"/>
-          </a:solidFill>
-          <a:ln>
-            <a:noFill/>
-          </a:ln>
-        </p:spPr>
-        <p:style>
-          <a:lnRef idx="1">
-            <a:schemeClr val="accent1"/>
-          </a:lnRef>
-          <a:fillRef idx="3">
-            <a:schemeClr val="accent1"/>
-          </a:fillRef>
-          <a:effectRef idx="2">
-            <a:schemeClr val="accent1"/>
-          </a:effectRef>
-          <a:fontRef idx="minor">
-            <a:schemeClr val="lt1"/>
-          </a:fontRef>
-        </p:style>
-        <p:txBody>
-          <a:bodyPr rtlCol="0" anchor="ctr"/>
-          <a:lstStyle/>
-          <a:p>
-            <a:pPr algn="ctr"/>
-          </a:p>
-        </p:txBody>
-      </p:sp>
-      <p:sp>
-        <p:nvSpPr>
-          <p:cNvPr id="3" name="TextBox 2"/>
-          <p:cNvSpPr txBox="1"/>
-          <p:nvPr/>
-        </p:nvSpPr>
-        <p:spPr>
-          <a:xfrm>
-            <a:off x="457200" y="137160"/>
-            <a:ext cx="8229600" cy="640080"/>
-          </a:xfrm>
-          <a:prstGeom prst="rect">
-            <a:avLst/>
-          </a:prstGeom>
-          <a:noFill/>
-        </p:spPr>
-        <p:txBody>
-          <a:bodyPr wrap="none">
-            <a:spAutoFit/>
-          </a:bodyPr>
-          <a:lstStyle/>
-          <a:p>
-            <a:pPr>
-              <a:defRPr sz="2800" b="1">
-                <a:solidFill>
-                  <a:srgbClr val="FFFFFF"/>
-                </a:solidFill>
-              </a:defRPr>
-            </a:pPr>
-            <a:r>
-              <a:t>New Maintainer — 5 Steps</a:t>
-            </a:r>
-          </a:p>
-        </p:txBody>
-      </p:sp>
-      <p:sp>
-        <p:nvSpPr>
-          <p:cNvPr id="4" name="TextBox 3"/>
-          <p:cNvSpPr txBox="1"/>
-          <p:nvPr/>
-        </p:nvSpPr>
-        <p:spPr>
-          <a:xfrm>
-            <a:off x="502920" y="1051560"/>
-            <a:ext cx="8229600" cy="5303520"/>
-          </a:xfrm>
-          <a:prstGeom prst="rect">
-            <a:avLst/>
-          </a:prstGeom>
-          <a:noFill/>
-        </p:spPr>
-        <p:txBody>
-          <a:bodyPr wrap="square" anchor="t">
-            <a:spAutoFit/>
-          </a:bodyPr>
-          <a:lstStyle/>
-          <a:p>
-            <a:pPr>
-              <a:spcAft>
-                <a:spcPts val="1000"/>
-              </a:spcAft>
-              <a:defRPr sz="1800">
-                <a:solidFill>
-                  <a:srgbClr val="1E293B"/>
-                </a:solidFill>
-              </a:defRPr>
-            </a:pPr>
-            <a:r>
-              <a:t>1. pip install -r requirements.txt  (from project root)</a:t>
-            </a:r>
-          </a:p>
-          <a:p>
-            <a:pPr>
-              <a:spcAft>
-                <a:spcPts val="1000"/>
-              </a:spcAft>
-              <a:defRPr sz="1800">
-                <a:solidFill>
-                  <a:srgbClr val="1E293B"/>
-                </a:solidFill>
-              </a:defRPr>
-            </a:pPr>
-            <a:r>
-              <a:t>2. cp .env.example .env → set CHATGPT_API_KEY (for gpt51 RAG)</a:t>
-            </a:r>
-          </a:p>
-          <a:p>
-            <a:pPr>
-              <a:spcAft>
-                <a:spcPts val="1000"/>
-              </a:spcAft>
-              <a:defRPr sz="1800">
-                <a:solidFill>
-                  <a:srgbClr val="1E293B"/>
-                </a:solidFill>
-              </a:defRPr>
-            </a:pPr>
-            <a:r>
-              <a:t>3. ollama serve; ollama pull mxbai-embed-large; ollama pull qwen2.5:7b</a:t>
-            </a:r>
-          </a:p>
-          <a:p>
-            <a:pPr>
-              <a:spcAft>
-                <a:spcPts val="1000"/>
-              </a:spcAft>
-              <a:defRPr sz="1800">
-                <a:solidFill>
-                  <a:srgbClr val="1E293B"/>
-                </a:solidFill>
-              </a:defRPr>
-            </a:pPr>
-            <a:r>
-              <a:t>4. Put PDFs in Database/ → python build_docindex.py</a:t>
-            </a:r>
-          </a:p>
-          <a:p>
-            <a:pPr>
-              <a:spcAft>
-                <a:spcPts val="1000"/>
-              </a:spcAft>
-              <a:defRPr sz="1800">
-                <a:solidFill>
-                  <a:srgbClr val="1E293B"/>
-                </a:solidFill>
-              </a:defRPr>
-            </a:pPr>
-            <a:r>
-              <a:t>5. python RAG-Interface/app.py  OR  python RAG/rag_query.py --query "…"</a:t>
-            </a:r>
-          </a:p>
-          <a:p>
-            <a:pPr>
-              <a:spcAft>
-                <a:spcPts val="1000"/>
-              </a:spcAft>
-              <a:defRPr sz="1800">
-                <a:solidFill>
-                  <a:srgbClr val="1E293B"/>
-                </a:solidFill>
-              </a:defRPr>
-            </a:pPr>
-            <a:r>
-              <a:t>Always run commands from the PageIndex/ project root</a:t>
             </a:r>
           </a:p>
         </p:txBody>
@@ -4476,7 +4497,7 @@
               </a:defRPr>
             </a:pPr>
             <a:r>
-              <a:t>Day-to-Day Operations</a:t>
+              <a:t>New Maintainer — 5 Steps</a:t>
             </a:r>
           </a:p>
         </p:txBody>
@@ -4514,82 +4535,82 @@
               </a:defRPr>
             </a:pPr>
             <a:r>
-              <a:t>Add PDF: copy to Database/ → python build_docindex.py (or single-file run_pageindex.py)</a:t>
-            </a:r>
-          </a:p>
-          <a:p>
-            <a:pPr>
-              <a:spcAft>
-                <a:spcPts val="1000"/>
-              </a:spcAft>
-              <a:defRPr sz="1800">
-                <a:solidFill>
-                  <a:srgbClr val="1E293B"/>
-                </a:solidFill>
-              </a:defRPr>
-            </a:pPr>
-            <a:r>
-              <a:t>Re-index after config changes: re-run indexing for affected PDFs</a:t>
-            </a:r>
-          </a:p>
-          <a:p>
-            <a:pPr>
-              <a:spcAft>
-                <a:spcPts val="1000"/>
-              </a:spcAft>
-              <a:defRPr sz="1800">
-                <a:solidFill>
-                  <a:srgbClr val="1E293B"/>
-                </a:solidFill>
-              </a:defRPr>
-            </a:pPr>
-            <a:r>
-              <a:t>Change answer model: edit rag.* in llm_models.yaml → restart chat UI</a:t>
-            </a:r>
-          </a:p>
-          <a:p>
-            <a:pPr>
-              <a:spcAft>
-                <a:spcPts val="1000"/>
-              </a:spcAft>
-              <a:defRPr sz="1800">
-                <a:solidFill>
-                  <a:srgbClr val="1E293B"/>
-                </a:solidFill>
-              </a:defRPr>
-            </a:pPr>
-            <a:r>
-              <a:t>Customize answers: edit prompts in RAG/utils.py</a:t>
-            </a:r>
-          </a:p>
-          <a:p>
-            <a:pPr>
-              <a:spcAft>
-                <a:spcPts val="1000"/>
-              </a:spcAft>
-              <a:defRPr sz="1800">
-                <a:solidFill>
-                  <a:srgbClr val="1E293B"/>
-                </a:solidFill>
-              </a:defRPr>
-            </a:pPr>
-            <a:r>
-              <a:t>  generate_answer_with_citations(), combine_answers(), tree_search()</a:t>
-            </a:r>
-          </a:p>
-          <a:p>
-            <a:pPr>
-              <a:spcAft>
-                <a:spcPts val="1000"/>
-              </a:spcAft>
-              <a:defRPr sz="1800">
-                <a:solidFill>
-                  <a:srgbClr val="1E293B"/>
-                </a:solidFill>
-              </a:defRPr>
-            </a:pPr>
-            <a:r>
-              <a:t>Logs: logs/ (indexing)  |  terminal output (RAG UI)</a:t>
+              <a:t>1. pip install -r requirements.txt  (from project root)</a:t>
+            </a:r>
+          </a:p>
+          <a:p>
+            <a:pPr>
+              <a:spcAft>
+                <a:spcPts val="1000"/>
+              </a:spcAft>
+              <a:defRPr sz="1800">
+                <a:solidFill>
+                  <a:srgbClr val="1E293B"/>
+                </a:solidFill>
+              </a:defRPr>
+            </a:pPr>
+            <a:r>
+              <a:t>2. cp .env.example .env → set CHATGPT_API_KEY (for gpt51 RAG)</a:t>
+            </a:r>
+          </a:p>
+          <a:p>
+            <a:pPr>
+              <a:spcAft>
+                <a:spcPts val="1000"/>
+              </a:spcAft>
+              <a:defRPr sz="1800">
+                <a:solidFill>
+                  <a:srgbClr val="1E293B"/>
+                </a:solidFill>
+              </a:defRPr>
+            </a:pPr>
+            <a:r>
+              <a:t>3. ollama serve; ollama pull mxbai-embed-large; ollama pull qwen2.5:7b</a:t>
+            </a:r>
+          </a:p>
+          <a:p>
+            <a:pPr>
+              <a:spcAft>
+                <a:spcPts val="1000"/>
+              </a:spcAft>
+              <a:defRPr sz="1800">
+                <a:solidFill>
+                  <a:srgbClr val="1E293B"/>
+                </a:solidFill>
+              </a:defRPr>
+            </a:pPr>
+            <a:r>
+              <a:t>4. Put PDFs in Database/ → python build_docindex.py</a:t>
+            </a:r>
+          </a:p>
+          <a:p>
+            <a:pPr>
+              <a:spcAft>
+                <a:spcPts val="1000"/>
+              </a:spcAft>
+              <a:defRPr sz="1800">
+                <a:solidFill>
+                  <a:srgbClr val="1E293B"/>
+                </a:solidFill>
+              </a:defRPr>
+            </a:pPr>
+            <a:r>
+              <a:t>5. python RAG-Interface/app.py  OR  python RAG/rag_query.py --query "…"</a:t>
+            </a:r>
+          </a:p>
+          <a:p>
+            <a:pPr>
+              <a:spcAft>
+                <a:spcPts val="1000"/>
+              </a:spcAft>
+              <a:defRPr sz="1800">
+                <a:solidFill>
+                  <a:srgbClr val="1E293B"/>
+                </a:solidFill>
+              </a:defRPr>
+            </a:pPr>
+            <a:r>
+              <a:t>Always run commands from the PageIndex/ project root</a:t>
             </a:r>
           </a:p>
         </p:txBody>
@@ -4693,7 +4714,7 @@
               </a:defRPr>
             </a:pPr>
             <a:r>
-              <a:t>Troubleshooting</a:t>
+              <a:t>Day-to-Day Operations</a:t>
             </a:r>
           </a:p>
         </p:txBody>
@@ -4731,97 +4752,97 @@
               </a:defRPr>
             </a:pPr>
             <a:r>
-              <a:t>No DocIndex found → run build_docindex.py from project root</a:t>
-            </a:r>
-          </a:p>
-          <a:p>
-            <a:pPr>
-              <a:spcAft>
-                <a:spcPts val="1000"/>
-              </a:spcAft>
-              <a:defRPr sz="1800">
-                <a:solidFill>
-                  <a:srgbClr val="1E293B"/>
-                </a:solidFill>
-              </a:defRPr>
-            </a:pPr>
-            <a:r>
-              <a:t>Ollama / embedding errors → ollama serve; pull mxbai-embed-large</a:t>
-            </a:r>
-          </a:p>
-          <a:p>
-            <a:pPr>
-              <a:spcAft>
-                <a:spcPts val="1000"/>
-              </a:spcAft>
-              <a:defRPr sz="1800">
-                <a:solidFill>
-                  <a:srgbClr val="1E293B"/>
-                </a:solidFill>
-              </a:defRPr>
-            </a:pPr>
-            <a:r>
-              <a:t>OpenAI errors → check CHATGPT_API_KEY for gpt* aliases</a:t>
-            </a:r>
-          </a:p>
-          <a:p>
-            <a:pPr>
-              <a:spcAft>
-                <a:spcPts val="1000"/>
-              </a:spcAft>
-              <a:defRPr sz="1800">
-                <a:solidFill>
-                  <a:srgbClr val="1E293B"/>
-                </a:solidFill>
-              </a:defRPr>
-            </a:pPr>
-            <a:r>
-              <a:t>No matching documents → re-index; lower keyword-match threshold</a:t>
-            </a:r>
-          </a:p>
-          <a:p>
-            <a:pPr>
-              <a:spcAft>
-                <a:spcPts val="1000"/>
-              </a:spcAft>
-              <a:defRPr sz="1800">
-                <a:solidFill>
-                  <a:srgbClr val="1E293B"/>
-                </a:solidFill>
-              </a:defRPr>
-            </a:pPr>
-            <a:r>
-              <a:t>Wrong results/ cache path → always cd to project root first</a:t>
-            </a:r>
-          </a:p>
-          <a:p>
-            <a:pPr>
-              <a:spcAft>
-                <a:spcPts val="1000"/>
-              </a:spcAft>
-              <a:defRPr sz="1800">
-                <a:solidFill>
-                  <a:srgbClr val="1E293B"/>
-                </a:solidFill>
-              </a:defRPr>
-            </a:pPr>
-            <a:r>
-              <a:t>GPU driver mismatch → reboot after NVIDIA driver updates</a:t>
-            </a:r>
-          </a:p>
-          <a:p>
-            <a:pPr>
-              <a:spcAft>
-                <a:spcPts val="1000"/>
-              </a:spcAft>
-              <a:defRPr sz="1800">
-                <a:solidFill>
-                  <a:srgbClr val="1E293B"/>
-                </a:solidFill>
-              </a:defRPr>
-            </a:pPr>
-            <a:r>
-              <a:t>Empty doc_authors → re-index PDF (author extraction was improved)</a:t>
+              <a:t>Add PDF: upload in DocIndex UI or copy to Database/ → index</a:t>
+            </a:r>
+          </a:p>
+          <a:p>
+            <a:pPr>
+              <a:spcAft>
+                <a:spcPts val="1000"/>
+              </a:spcAft>
+              <a:defRPr sz="1800">
+                <a:solidFill>
+                  <a:srgbClr val="1E293B"/>
+                </a:solidFill>
+              </a:defRPr>
+            </a:pPr>
+            <a:r>
+              <a:t>Remove PDF: Remove button in DocIndex UI (cleans all artifacts)</a:t>
+            </a:r>
+          </a:p>
+          <a:p>
+            <a:pPr>
+              <a:spcAft>
+                <a:spcPts val="1000"/>
+              </a:spcAft>
+              <a:defRPr sz="1800">
+                <a:solidFill>
+                  <a:srgbClr val="1E293B"/>
+                </a:solidFill>
+              </a:defRPr>
+            </a:pPr>
+            <a:r>
+              <a:t>Re-index: Update Structure (one file) or DocIndex Reconstruction (all)</a:t>
+            </a:r>
+          </a:p>
+          <a:p>
+            <a:pPr>
+              <a:spcAft>
+                <a:spcPts val="1000"/>
+              </a:spcAft>
+              <a:defRPr sz="1800">
+                <a:solidFill>
+                  <a:srgbClr val="1E293B"/>
+                </a:solidFill>
+              </a:defRPr>
+            </a:pPr>
+            <a:r>
+              <a:t>Change answer model: edit rag.* in llm_models.yaml → restart chat UI</a:t>
+            </a:r>
+          </a:p>
+          <a:p>
+            <a:pPr>
+              <a:spcAft>
+                <a:spcPts val="1000"/>
+              </a:spcAft>
+              <a:defRPr sz="1800">
+                <a:solidFill>
+                  <a:srgbClr val="1E293B"/>
+                </a:solidFill>
+              </a:defRPr>
+            </a:pPr>
+            <a:r>
+              <a:t>Customize prompts: RAG/utils.py (answers, tree search, history helpers)</a:t>
+            </a:r>
+          </a:p>
+          <a:p>
+            <a:pPr>
+              <a:spcAft>
+                <a:spcPts val="1000"/>
+              </a:spcAft>
+              <a:defRPr sz="1800">
+                <a:solidFill>
+                  <a:srgbClr val="1E293B"/>
+                </a:solidFill>
+              </a:defRPr>
+            </a:pPr>
+            <a:r>
+              <a:t>After git pull: restart Flask apps so new API routes load</a:t>
+            </a:r>
+          </a:p>
+          <a:p>
+            <a:pPr>
+              <a:spcAft>
+                <a:spcPts val="1000"/>
+              </a:spcAft>
+              <a:defRPr sz="1800">
+                <a:solidFill>
+                  <a:srgbClr val="1E293B"/>
+                </a:solidFill>
+              </a:defRPr>
+            </a:pPr>
+            <a:r>
+              <a:t>Logs: logs/ (indexing) | terminal output (web UIs)</a:t>
             </a:r>
           </a:p>
         </p:txBody>
@@ -4925,7 +4946,7 @@
               </a:defRPr>
             </a:pPr>
             <a:r>
-              <a:t>Evaluation &amp; Documentation</a:t>
+              <a:t>Troubleshooting</a:t>
             </a:r>
           </a:p>
         </p:txBody>
@@ -4963,97 +4984,97 @@
               </a:defRPr>
             </a:pPr>
             <a:r>
-              <a:t>README.md — full setup, reference, troubleshooting</a:t>
-            </a:r>
-          </a:p>
-          <a:p>
-            <a:pPr>
-              <a:spcAft>
-                <a:spcPts val="1000"/>
-              </a:spcAft>
-              <a:defRPr sz="1800">
-                <a:solidFill>
-                  <a:srgbClr val="1E293B"/>
-                </a:solidFill>
-              </a:defRPr>
-            </a:pPr>
-            <a:r>
-              <a:t>docs/PageIndex_Handoff.pptx — handoff slide deck</a:t>
-            </a:r>
-          </a:p>
-          <a:p>
-            <a:pPr>
-              <a:spcAft>
-                <a:spcPts val="1000"/>
-              </a:spcAft>
-              <a:defRPr sz="1800">
-                <a:solidFill>
-                  <a:srgbClr val="1E293B"/>
-                </a:solidFill>
-              </a:defRPr>
-            </a:pPr>
-            <a:r>
-              <a:t>.env.example — secrets template</a:t>
-            </a:r>
-          </a:p>
-          <a:p>
-            <a:pPr>
-              <a:spcAft>
-                <a:spcPts val="1000"/>
-              </a:spcAft>
-              <a:defRPr sz="1800">
-                <a:solidFill>
-                  <a:srgbClr val="1E293B"/>
-                </a:solidFill>
-              </a:defRPr>
-            </a:pPr>
-            <a:r>
-              <a:t>OLLAMA_SETUP.md — Ollama install guide</a:t>
-            </a:r>
-          </a:p>
-          <a:p>
-            <a:pPr>
-              <a:spcAft>
-                <a:spcPts val="1000"/>
-              </a:spcAft>
-              <a:defRPr sz="1800">
-                <a:solidFill>
-                  <a:srgbClr val="1E293B"/>
-                </a:solidFill>
-              </a:defRPr>
-            </a:pPr>
-            <a:r>
-              <a:t>benchmarks/run_benchmarks.py — timing harness</a:t>
-            </a:r>
-          </a:p>
-          <a:p>
-            <a:pPr>
-              <a:spcAft>
-                <a:spcPts val="1000"/>
-              </a:spcAft>
-              <a:defRPr sz="1800">
-                <a:solidFill>
-                  <a:srgbClr val="1E293B"/>
-                </a:solidFill>
-              </a:defRPr>
-            </a:pPr>
-            <a:r>
-              <a:t>eval/ragas_eval.py — answer quality (needs OPENAI_API_KEY for judge)</a:t>
-            </a:r>
-          </a:p>
-          <a:p>
-            <a:pPr>
-              <a:spcAft>
-                <a:spcPts val="1000"/>
-              </a:spcAft>
-              <a:defRPr sz="1800">
-                <a:solidFill>
-                  <a:srgbClr val="1E293B"/>
-                </a:solidFill>
-              </a:defRPr>
-            </a:pPr>
-            <a:r>
-              <a:t>cookbook/, tutorials/ — upstream PageIndex reference material</a:t>
+              <a:t>No DocIndex found → run build_docindex.py from project root</a:t>
+            </a:r>
+          </a:p>
+          <a:p>
+            <a:pPr>
+              <a:spcAft>
+                <a:spcPts val="1000"/>
+              </a:spcAft>
+              <a:defRPr sz="1800">
+                <a:solidFill>
+                  <a:srgbClr val="1E293B"/>
+                </a:solidFill>
+              </a:defRPr>
+            </a:pPr>
+            <a:r>
+              <a:t>Ollama / embedding errors → ollama serve; pull mxbai-embed-large</a:t>
+            </a:r>
+          </a:p>
+          <a:p>
+            <a:pPr>
+              <a:spcAft>
+                <a:spcPts val="1000"/>
+              </a:spcAft>
+              <a:defRPr sz="1800">
+                <a:solidFill>
+                  <a:srgbClr val="1E293B"/>
+                </a:solidFill>
+              </a:defRPr>
+            </a:pPr>
+            <a:r>
+              <a:t>OpenAI errors → check CHATGPT_API_KEY for gpt* aliases</a:t>
+            </a:r>
+          </a:p>
+          <a:p>
+            <a:pPr>
+              <a:spcAft>
+                <a:spcPts val="1000"/>
+              </a:spcAft>
+              <a:defRPr sz="1800">
+                <a:solidFill>
+                  <a:srgbClr val="1E293B"/>
+                </a:solidFill>
+              </a:defRPr>
+            </a:pPr>
+            <a:r>
+              <a:t>DocIndex API 404 / JSON parse error → restart Flask server</a:t>
+            </a:r>
+          </a:p>
+          <a:p>
+            <a:pPr>
+              <a:spcAft>
+                <a:spcPts val="1000"/>
+              </a:spcAft>
+              <a:defRPr sz="1800">
+                <a:solidFill>
+                  <a:srgbClr val="1E293B"/>
+                </a:solidFill>
+              </a:defRPr>
+            </a:pPr>
+            <a:r>
+              <a:t>No matching documents → re-index; lower keyword-match threshold</a:t>
+            </a:r>
+          </a:p>
+          <a:p>
+            <a:pPr>
+              <a:spcAft>
+                <a:spcPts val="1000"/>
+              </a:spcAft>
+              <a:defRPr sz="1800">
+                <a:solidFill>
+                  <a:srgbClr val="1E293B"/>
+                </a:solidFill>
+              </a:defRPr>
+            </a:pPr>
+            <a:r>
+              <a:t>Empty doc_authors → re-index PDF (author extraction improved)</a:t>
+            </a:r>
+          </a:p>
+          <a:p>
+            <a:pPr>
+              <a:spcAft>
+                <a:spcPts val="1000"/>
+              </a:spcAft>
+              <a:defRPr sz="1800">
+                <a:solidFill>
+                  <a:srgbClr val="1E293B"/>
+                </a:solidFill>
+              </a:defRPr>
+            </a:pPr>
+            <a:r>
+              <a:t>GPU driver mismatch → reboot after NVIDIA driver updates</a:t>
             </a:r>
           </a:p>
         </p:txBody>
@@ -5157,7 +5178,7 @@
               </a:defRPr>
             </a:pPr>
             <a:r>
-              <a:t>Handoff Checklist</a:t>
+              <a:t>Documentation</a:t>
             </a:r>
           </a:p>
         </p:txBody>
@@ -5195,112 +5216,97 @@
               </a:defRPr>
             </a:pPr>
             <a:r>
-              <a:t>☐ Repo access transferred</a:t>
-            </a:r>
-          </a:p>
-          <a:p>
-            <a:pPr>
-              <a:spcAft>
-                <a:spcPts val="1000"/>
-              </a:spcAft>
-              <a:defRPr sz="1800">
-                <a:solidFill>
-                  <a:srgbClr val="1E293B"/>
-                </a:solidFill>
-              </a:defRPr>
-            </a:pPr>
-            <a:r>
-              <a:t>☐ Python 3.12 environment + requirements installed</a:t>
-            </a:r>
-          </a:p>
-          <a:p>
-            <a:pPr>
-              <a:spcAft>
-                <a:spcPts val="1000"/>
-              </a:spcAft>
-              <a:defRPr sz="1800">
-                <a:solidFill>
-                  <a:srgbClr val="1E293B"/>
-                </a:solidFill>
-              </a:defRPr>
-            </a:pPr>
-            <a:r>
-              <a:t>☐ .env configured (CHATGPT_API_KEY, Ollama URL)</a:t>
-            </a:r>
-          </a:p>
-          <a:p>
-            <a:pPr>
-              <a:spcAft>
-                <a:spcPts val="1000"/>
-              </a:spcAft>
-              <a:defRPr sz="1800">
-                <a:solidFill>
-                  <a:srgbClr val="1E293B"/>
-                </a:solidFill>
-              </a:defRPr>
-            </a:pPr>
-            <a:r>
-              <a:t>☐ Ollama running with mxbai-embed-large + qwen2.5:7b</a:t>
-            </a:r>
-          </a:p>
-          <a:p>
-            <a:pPr>
-              <a:spcAft>
-                <a:spcPts val="1000"/>
-              </a:spcAft>
-              <a:defRPr sz="1800">
-                <a:solidFill>
-                  <a:srgbClr val="1E293B"/>
-                </a:solidFill>
-              </a:defRPr>
-            </a:pPr>
-            <a:r>
-              <a:t>☐ Database/ PDFs present; build_docindex.py completed</a:t>
-            </a:r>
-          </a:p>
-          <a:p>
-            <a:pPr>
-              <a:spcAft>
-                <a:spcPts val="1000"/>
-              </a:spcAft>
-              <a:defRPr sz="1800">
-                <a:solidFill>
-                  <a:srgbClr val="1E293B"/>
-                </a:solidFill>
-              </a:defRPr>
-            </a:pPr>
-            <a:r>
-              <a:t>☐ results/DocIndex.json exists</a:t>
-            </a:r>
-          </a:p>
-          <a:p>
-            <a:pPr>
-              <a:spcAft>
-                <a:spcPts val="1000"/>
-              </a:spcAft>
-              <a:defRPr sz="1800">
-                <a:solidFill>
-                  <a:srgbClr val="1E293B"/>
-                </a:solidFill>
-              </a:defRPr>
-            </a:pPr>
-            <a:r>
-              <a:t>☐ RAG chat smoke test passed (including a follow-up question)</a:t>
-            </a:r>
-          </a:p>
-          <a:p>
-            <a:pPr>
-              <a:spcAft>
-                <a:spcPts val="1000"/>
-              </a:spcAft>
-              <a:defRPr sz="1800">
-                <a:solidFill>
-                  <a:srgbClr val="1E293B"/>
-                </a:solidFill>
-              </a:defRPr>
-            </a:pPr>
-            <a:r>
-              <a:t>☐ README.md reviewed by new maintainer</a:t>
+              <a:t>README.md — full setup, reference, troubleshooting</a:t>
+            </a:r>
+          </a:p>
+          <a:p>
+            <a:pPr>
+              <a:spcAft>
+                <a:spcPts val="1000"/>
+              </a:spcAft>
+              <a:defRPr sz="1800">
+                <a:solidFill>
+                  <a:srgbClr val="1E293B"/>
+                </a:solidFill>
+              </a:defRPr>
+            </a:pPr>
+            <a:r>
+              <a:t>RAG-Interface/README.md — chat UI + conversation history</a:t>
+            </a:r>
+          </a:p>
+          <a:p>
+            <a:pPr>
+              <a:spcAft>
+                <a:spcPts val="1000"/>
+              </a:spcAft>
+              <a:defRPr sz="1800">
+                <a:solidFill>
+                  <a:srgbClr val="1E293B"/>
+                </a:solidFill>
+              </a:defRPr>
+            </a:pPr>
+            <a:r>
+              <a:t>DocIndex-Interface/README.md — upload, index, remove</a:t>
+            </a:r>
+          </a:p>
+          <a:p>
+            <a:pPr>
+              <a:spcAft>
+                <a:spcPts val="1000"/>
+              </a:spcAft>
+              <a:defRPr sz="1800">
+                <a:solidFill>
+                  <a:srgbClr val="1E293B"/>
+                </a:solidFill>
+              </a:defRPr>
+            </a:pPr>
+            <a:r>
+              <a:t>docs/PageIndex_Handoff.pptx — this slide deck</a:t>
+            </a:r>
+          </a:p>
+          <a:p>
+            <a:pPr>
+              <a:spcAft>
+                <a:spcPts val="1000"/>
+              </a:spcAft>
+              <a:defRPr sz="1800">
+                <a:solidFill>
+                  <a:srgbClr val="1E293B"/>
+                </a:solidFill>
+              </a:defRPr>
+            </a:pPr>
+            <a:r>
+              <a:t>.env.example — secrets template</a:t>
+            </a:r>
+          </a:p>
+          <a:p>
+            <a:pPr>
+              <a:spcAft>
+                <a:spcPts val="1000"/>
+              </a:spcAft>
+              <a:defRPr sz="1800">
+                <a:solidFill>
+                  <a:srgbClr val="1E293B"/>
+                </a:solidFill>
+              </a:defRPr>
+            </a:pPr>
+            <a:r>
+              <a:t>scripts/generate_handoff_ppt.py — regenerate deck</a:t>
+            </a:r>
+          </a:p>
+          <a:p>
+            <a:pPr>
+              <a:spcAft>
+                <a:spcPts val="1000"/>
+              </a:spcAft>
+              <a:defRPr sz="1800">
+                <a:solidFill>
+                  <a:srgbClr val="1E293B"/>
+                </a:solidFill>
+              </a:defRPr>
+            </a:pPr>
+            <a:r>
+              <a:t>benchmarks/ + eval/ — timing and RAGAS evaluation</a:t>
             </a:r>
           </a:p>
         </p:txBody>
@@ -5516,6 +5522,253 @@
 </file>
 
 <file path=ppt/slides/slide20.xml><?xml version="1.0" encoding="utf-8"?>
+<p:sld xmlns:a="http://schemas.openxmlformats.org/drawingml/2006/main" xmlns:p="http://schemas.openxmlformats.org/presentationml/2006/main" xmlns:r="http://schemas.openxmlformats.org/officeDocument/2006/relationships">
+  <p:cSld>
+    <p:bg>
+      <p:bgPr>
+        <a:solidFill>
+          <a:srgbClr val="FFFFFF"/>
+        </a:solidFill>
+        <a:effectLst/>
+      </p:bgPr>
+    </p:bg>
+    <p:spTree>
+      <p:nvGrpSpPr>
+        <p:cNvPr id="1" name=""/>
+        <p:cNvGrpSpPr/>
+        <p:nvPr/>
+      </p:nvGrpSpPr>
+      <p:grpSpPr/>
+      <p:sp>
+        <p:nvSpPr>
+          <p:cNvPr id="2" name="Rectangle 1"/>
+          <p:cNvSpPr/>
+          <p:nvPr/>
+        </p:nvSpPr>
+        <p:spPr>
+          <a:xfrm>
+            <a:off x="0" y="0"/>
+            <a:ext cx="9144000" cy="822960"/>
+          </a:xfrm>
+          <a:prstGeom prst="rect">
+            <a:avLst/>
+          </a:prstGeom>
+          <a:solidFill>
+            <a:srgbClr val="0D9488"/>
+          </a:solidFill>
+          <a:ln>
+            <a:noFill/>
+          </a:ln>
+        </p:spPr>
+        <p:style>
+          <a:lnRef idx="1">
+            <a:schemeClr val="accent1"/>
+          </a:lnRef>
+          <a:fillRef idx="3">
+            <a:schemeClr val="accent1"/>
+          </a:fillRef>
+          <a:effectRef idx="2">
+            <a:schemeClr val="accent1"/>
+          </a:effectRef>
+          <a:fontRef idx="minor">
+            <a:schemeClr val="lt1"/>
+          </a:fontRef>
+        </p:style>
+        <p:txBody>
+          <a:bodyPr rtlCol="0" anchor="ctr"/>
+          <a:lstStyle/>
+          <a:p>
+            <a:pPr algn="ctr"/>
+          </a:p>
+        </p:txBody>
+      </p:sp>
+      <p:sp>
+        <p:nvSpPr>
+          <p:cNvPr id="3" name="TextBox 2"/>
+          <p:cNvSpPr txBox="1"/>
+          <p:nvPr/>
+        </p:nvSpPr>
+        <p:spPr>
+          <a:xfrm>
+            <a:off x="457200" y="137160"/>
+            <a:ext cx="8229600" cy="640080"/>
+          </a:xfrm>
+          <a:prstGeom prst="rect">
+            <a:avLst/>
+          </a:prstGeom>
+          <a:noFill/>
+        </p:spPr>
+        <p:txBody>
+          <a:bodyPr wrap="none">
+            <a:spAutoFit/>
+          </a:bodyPr>
+          <a:lstStyle/>
+          <a:p>
+            <a:pPr>
+              <a:defRPr sz="2800" b="1">
+                <a:solidFill>
+                  <a:srgbClr val="FFFFFF"/>
+                </a:solidFill>
+              </a:defRPr>
+            </a:pPr>
+            <a:r>
+              <a:t>Handoff Checklist</a:t>
+            </a:r>
+          </a:p>
+        </p:txBody>
+      </p:sp>
+      <p:sp>
+        <p:nvSpPr>
+          <p:cNvPr id="4" name="TextBox 3"/>
+          <p:cNvSpPr txBox="1"/>
+          <p:nvPr/>
+        </p:nvSpPr>
+        <p:spPr>
+          <a:xfrm>
+            <a:off x="502920" y="1051560"/>
+            <a:ext cx="8229600" cy="5303520"/>
+          </a:xfrm>
+          <a:prstGeom prst="rect">
+            <a:avLst/>
+          </a:prstGeom>
+          <a:noFill/>
+        </p:spPr>
+        <p:txBody>
+          <a:bodyPr wrap="square" anchor="t">
+            <a:spAutoFit/>
+          </a:bodyPr>
+          <a:lstStyle/>
+          <a:p>
+            <a:pPr>
+              <a:spcAft>
+                <a:spcPts val="1000"/>
+              </a:spcAft>
+              <a:defRPr sz="1800">
+                <a:solidFill>
+                  <a:srgbClr val="1E293B"/>
+                </a:solidFill>
+              </a:defRPr>
+            </a:pPr>
+            <a:r>
+              <a:t>☐ Repo access transferred</a:t>
+            </a:r>
+          </a:p>
+          <a:p>
+            <a:pPr>
+              <a:spcAft>
+                <a:spcPts val="1000"/>
+              </a:spcAft>
+              <a:defRPr sz="1800">
+                <a:solidFill>
+                  <a:srgbClr val="1E293B"/>
+                </a:solidFill>
+              </a:defRPr>
+            </a:pPr>
+            <a:r>
+              <a:t>☐ Python 3.12 + pip install -r requirements.txt</a:t>
+            </a:r>
+          </a:p>
+          <a:p>
+            <a:pPr>
+              <a:spcAft>
+                <a:spcPts val="1000"/>
+              </a:spcAft>
+              <a:defRPr sz="1800">
+                <a:solidFill>
+                  <a:srgbClr val="1E293B"/>
+                </a:solidFill>
+              </a:defRPr>
+            </a:pPr>
+            <a:r>
+              <a:t>☐ .env from .env.example; CHATGPT_API_KEY set if using gpt51</a:t>
+            </a:r>
+          </a:p>
+          <a:p>
+            <a:pPr>
+              <a:spcAft>
+                <a:spcPts val="1000"/>
+              </a:spcAft>
+              <a:defRPr sz="1800">
+                <a:solidFill>
+                  <a:srgbClr val="1E293B"/>
+                </a:solidFill>
+              </a:defRPr>
+            </a:pPr>
+            <a:r>
+              <a:t>☐ Ollama running; mxbai-embed-large + qwen2.5:7b pulled</a:t>
+            </a:r>
+          </a:p>
+          <a:p>
+            <a:pPr>
+              <a:spcAft>
+                <a:spcPts val="1000"/>
+              </a:spcAft>
+              <a:defRPr sz="1800">
+                <a:solidFill>
+                  <a:srgbClr val="1E293B"/>
+                </a:solidFill>
+              </a:defRPr>
+            </a:pPr>
+            <a:r>
+              <a:t>☐ build_docindex.py completed; results/DocIndex.json exists</a:t>
+            </a:r>
+          </a:p>
+          <a:p>
+            <a:pPr>
+              <a:spcAft>
+                <a:spcPts val="1000"/>
+              </a:spcAft>
+              <a:defRPr sz="1800">
+                <a:solidFill>
+                  <a:srgbClr val="1E293B"/>
+                </a:solidFill>
+              </a:defRPr>
+            </a:pPr>
+            <a:r>
+              <a:t>☐ RAG chat: question + follow-up smoke test (port 5001)</a:t>
+            </a:r>
+          </a:p>
+          <a:p>
+            <a:pPr>
+              <a:spcAft>
+                <a:spcPts val="1000"/>
+              </a:spcAft>
+              <a:defRPr sz="1800">
+                <a:solidFill>
+                  <a:srgbClr val="1E293B"/>
+                </a:solidFill>
+              </a:defRPr>
+            </a:pPr>
+            <a:r>
+              <a:t>☐ DocIndex manager: upload, index, remove smoke test (port 5002)</a:t>
+            </a:r>
+          </a:p>
+          <a:p>
+            <a:pPr>
+              <a:spcAft>
+                <a:spcPts val="1000"/>
+              </a:spcAft>
+              <a:defRPr sz="1800">
+                <a:solidFill>
+                  <a:srgbClr val="1E293B"/>
+                </a:solidFill>
+              </a:defRPr>
+            </a:pPr>
+            <a:r>
+              <a:t>☐ README.md + handoff PPT reviewed by new maintainer</a:t>
+            </a:r>
+          </a:p>
+        </p:txBody>
+      </p:sp>
+    </p:spTree>
+  </p:cSld>
+  <p:clrMapOvr>
+    <a:masterClrMapping/>
+  </p:clrMapOvr>
+</p:sld>
+</file>
+
+<file path=ppt/slides/slide21.xml><?xml version="1.0" encoding="utf-8"?>
 <p:sld xmlns:a="http://schemas.openxmlformats.org/drawingml/2006/main" xmlns:p="http://schemas.openxmlformats.org/presentationml/2006/main" xmlns:r="http://schemas.openxmlformats.org/officeDocument/2006/relationships">
   <p:cSld>
     <p:bg>
